--- a/versions/03-weekly/Wide/Editable.pptx
+++ b/versions/03-weekly/Wide/Editable.pptx
@@ -3633,7 +3633,7 @@
         </p:nvSpPr>
         <p:spPr>
           <a:xfrm>
-            <a:off x="2171481" y="895259"/>
+            <a:off x="2171481" y="752399"/>
             <a:ext cx="1609562" cy="457153"/>
           </a:xfrm>
           <a:prstGeom prst="rect">
